--- a/ProjectX.pptx
+++ b/ProjectX.pptx
@@ -14,7 +14,8 @@
     <p:sldId id="262" r:id="rId8"/>
     <p:sldId id="263" r:id="rId9"/>
     <p:sldId id="264" r:id="rId10"/>
-    <p:sldId id="266" r:id="rId11"/>
+    <p:sldId id="267" r:id="rId11"/>
+    <p:sldId id="266" r:id="rId12"/>
   </p:sldIdLst>
   <p:sldSz cx="12192000" cy="6858000"/>
   <p:notesSz cx="6858000" cy="9144000"/>
@@ -113,6 +114,11 @@
       </a:defRPr>
     </a:lvl9pPr>
   </p:defaultTextStyle>
+  <p:extLst>
+    <p:ext uri="{EFAFB233-063F-42B5-8137-9DF3F51BA10A}">
+      <p15:sldGuideLst xmlns:p15="http://schemas.microsoft.com/office/powerpoint/2012/main"/>
+    </p:ext>
+  </p:extLst>
 </p:presentation>
 </file>
 
@@ -263,7 +269,7 @@
           <a:p>
             <a:fld id="{C226A176-CEA0-4BFF-B5F8-F3AA3C67D0F3}" type="datetimeFigureOut">
               <a:rPr lang="ru-RU" smtClean="0"/>
-              <a:t>22.05.2025</a:t>
+              <a:t>23.05.2025</a:t>
             </a:fld>
             <a:endParaRPr lang="ru-RU"/>
           </a:p>
@@ -461,7 +467,7 @@
           <a:p>
             <a:fld id="{C226A176-CEA0-4BFF-B5F8-F3AA3C67D0F3}" type="datetimeFigureOut">
               <a:rPr lang="ru-RU" smtClean="0"/>
-              <a:t>22.05.2025</a:t>
+              <a:t>23.05.2025</a:t>
             </a:fld>
             <a:endParaRPr lang="ru-RU"/>
           </a:p>
@@ -669,7 +675,7 @@
           <a:p>
             <a:fld id="{C226A176-CEA0-4BFF-B5F8-F3AA3C67D0F3}" type="datetimeFigureOut">
               <a:rPr lang="ru-RU" smtClean="0"/>
-              <a:t>22.05.2025</a:t>
+              <a:t>23.05.2025</a:t>
             </a:fld>
             <a:endParaRPr lang="ru-RU"/>
           </a:p>
@@ -867,7 +873,7 @@
           <a:p>
             <a:fld id="{C226A176-CEA0-4BFF-B5F8-F3AA3C67D0F3}" type="datetimeFigureOut">
               <a:rPr lang="ru-RU" smtClean="0"/>
-              <a:t>22.05.2025</a:t>
+              <a:t>23.05.2025</a:t>
             </a:fld>
             <a:endParaRPr lang="ru-RU"/>
           </a:p>
@@ -1142,7 +1148,7 @@
           <a:p>
             <a:fld id="{C226A176-CEA0-4BFF-B5F8-F3AA3C67D0F3}" type="datetimeFigureOut">
               <a:rPr lang="ru-RU" smtClean="0"/>
-              <a:t>22.05.2025</a:t>
+              <a:t>23.05.2025</a:t>
             </a:fld>
             <a:endParaRPr lang="ru-RU"/>
           </a:p>
@@ -1407,7 +1413,7 @@
           <a:p>
             <a:fld id="{C226A176-CEA0-4BFF-B5F8-F3AA3C67D0F3}" type="datetimeFigureOut">
               <a:rPr lang="ru-RU" smtClean="0"/>
-              <a:t>22.05.2025</a:t>
+              <a:t>23.05.2025</a:t>
             </a:fld>
             <a:endParaRPr lang="ru-RU"/>
           </a:p>
@@ -1819,7 +1825,7 @@
           <a:p>
             <a:fld id="{C226A176-CEA0-4BFF-B5F8-F3AA3C67D0F3}" type="datetimeFigureOut">
               <a:rPr lang="ru-RU" smtClean="0"/>
-              <a:t>22.05.2025</a:t>
+              <a:t>23.05.2025</a:t>
             </a:fld>
             <a:endParaRPr lang="ru-RU"/>
           </a:p>
@@ -1960,7 +1966,7 @@
           <a:p>
             <a:fld id="{C226A176-CEA0-4BFF-B5F8-F3AA3C67D0F3}" type="datetimeFigureOut">
               <a:rPr lang="ru-RU" smtClean="0"/>
-              <a:t>22.05.2025</a:t>
+              <a:t>23.05.2025</a:t>
             </a:fld>
             <a:endParaRPr lang="ru-RU"/>
           </a:p>
@@ -2073,7 +2079,7 @@
           <a:p>
             <a:fld id="{C226A176-CEA0-4BFF-B5F8-F3AA3C67D0F3}" type="datetimeFigureOut">
               <a:rPr lang="ru-RU" smtClean="0"/>
-              <a:t>22.05.2025</a:t>
+              <a:t>23.05.2025</a:t>
             </a:fld>
             <a:endParaRPr lang="ru-RU"/>
           </a:p>
@@ -2384,7 +2390,7 @@
           <a:p>
             <a:fld id="{C226A176-CEA0-4BFF-B5F8-F3AA3C67D0F3}" type="datetimeFigureOut">
               <a:rPr lang="ru-RU" smtClean="0"/>
-              <a:t>22.05.2025</a:t>
+              <a:t>23.05.2025</a:t>
             </a:fld>
             <a:endParaRPr lang="ru-RU"/>
           </a:p>
@@ -2672,7 +2678,7 @@
           <a:p>
             <a:fld id="{C226A176-CEA0-4BFF-B5F8-F3AA3C67D0F3}" type="datetimeFigureOut">
               <a:rPr lang="ru-RU" smtClean="0"/>
-              <a:t>22.05.2025</a:t>
+              <a:t>23.05.2025</a:t>
             </a:fld>
             <a:endParaRPr lang="ru-RU"/>
           </a:p>
@@ -2918,7 +2924,7 @@
           <a:p>
             <a:fld id="{C226A176-CEA0-4BFF-B5F8-F3AA3C67D0F3}" type="datetimeFigureOut">
               <a:rPr lang="ru-RU" smtClean="0"/>
-              <a:t>22.05.2025</a:t>
+              <a:t>23.05.2025</a:t>
             </a:fld>
             <a:endParaRPr lang="ru-RU"/>
           </a:p>
@@ -3351,15 +3357,20 @@
             <p:ph type="ctrTitle"/>
           </p:nvPr>
         </p:nvSpPr>
-        <p:spPr/>
+        <p:spPr>
+          <a:xfrm>
+            <a:off x="1524000" y="3606801"/>
+            <a:ext cx="9144000" cy="1236663"/>
+          </a:xfrm>
+        </p:spPr>
         <p:txBody>
           <a:bodyPr>
-            <a:normAutofit/>
+            <a:normAutofit fontScale="90000"/>
           </a:bodyPr>
           <a:lstStyle/>
           <a:p>
             <a:r>
-              <a:rPr lang="en-US" sz="4400" b="1" dirty="0" err="1">
+              <a:rPr lang="en-US" b="1" dirty="0" err="1">
                 <a:latin typeface="Times New Roman" panose="02020603050405020304" pitchFamily="18" charset="0"/>
                 <a:cs typeface="Times New Roman" panose="02020603050405020304" pitchFamily="18" charset="0"/>
               </a:rPr>
@@ -3469,6 +3480,42 @@
           </a:p>
         </p:txBody>
       </p:sp>
+      <p:pic>
+        <p:nvPicPr>
+          <p:cNvPr id="5" name="Рисунок 4">
+            <a:extLst>
+              <a:ext uri="{FF2B5EF4-FFF2-40B4-BE49-F238E27FC236}">
+                <a16:creationId xmlns:a16="http://schemas.microsoft.com/office/drawing/2014/main" id="{67D09C36-57E2-471A-B98D-A528F74EF372}"/>
+              </a:ext>
+            </a:extLst>
+          </p:cNvPr>
+          <p:cNvPicPr>
+            <a:picLocks noChangeAspect="1"/>
+          </p:cNvPicPr>
+          <p:nvPr/>
+        </p:nvPicPr>
+        <p:blipFill>
+          <a:blip r:embed="rId2">
+            <a:extLst>
+              <a:ext uri="{28A0092B-C50C-407E-A947-70E740481C1C}">
+                <a14:useLocalDpi xmlns:a14="http://schemas.microsoft.com/office/drawing/2010/main" val="0"/>
+              </a:ext>
+            </a:extLst>
+          </a:blip>
+          <a:stretch>
+            <a:fillRect/>
+          </a:stretch>
+        </p:blipFill>
+        <p:spPr>
+          <a:xfrm>
+            <a:off x="4706923" y="279400"/>
+            <a:ext cx="2895600" cy="2895600"/>
+          </a:xfrm>
+          <a:prstGeom prst="rect">
+            <a:avLst/>
+          </a:prstGeom>
+        </p:spPr>
+      </p:pic>
     </p:spTree>
     <p:extLst>
       <p:ext uri="{BB962C8B-B14F-4D97-AF65-F5344CB8AC3E}">
@@ -3499,6 +3546,154 @@
           <a:chExt cx="0" cy="0"/>
         </a:xfrm>
       </p:grpSpPr>
+      <p:sp>
+        <p:nvSpPr>
+          <p:cNvPr id="2" name="Заголовок 1">
+            <a:extLst>
+              <a:ext uri="{FF2B5EF4-FFF2-40B4-BE49-F238E27FC236}">
+                <a16:creationId xmlns:a16="http://schemas.microsoft.com/office/drawing/2014/main" id="{63B9A613-09F7-4E8D-A0E3-D58ADF724417}"/>
+              </a:ext>
+            </a:extLst>
+          </p:cNvPr>
+          <p:cNvSpPr>
+            <a:spLocks noGrp="1"/>
+          </p:cNvSpPr>
+          <p:nvPr>
+            <p:ph type="title"/>
+          </p:nvPr>
+        </p:nvSpPr>
+        <p:spPr>
+          <a:xfrm>
+            <a:off x="3949700" y="361156"/>
+            <a:ext cx="4292600" cy="1325563"/>
+          </a:xfrm>
+        </p:spPr>
+        <p:txBody>
+          <a:bodyPr>
+            <a:normAutofit/>
+          </a:bodyPr>
+          <a:lstStyle/>
+          <a:p>
+            <a:r>
+              <a:rPr lang="ru-RU" sz="6000" b="1" dirty="0">
+                <a:latin typeface="Times New Roman" panose="02020603050405020304" pitchFamily="18" charset="0"/>
+                <a:cs typeface="Times New Roman" panose="02020603050405020304" pitchFamily="18" charset="0"/>
+              </a:rPr>
+              <a:t>Интерфейс</a:t>
+            </a:r>
+          </a:p>
+        </p:txBody>
+      </p:sp>
+      <p:sp>
+        <p:nvSpPr>
+          <p:cNvPr id="3" name="Объект 2">
+            <a:extLst>
+              <a:ext uri="{FF2B5EF4-FFF2-40B4-BE49-F238E27FC236}">
+                <a16:creationId xmlns:a16="http://schemas.microsoft.com/office/drawing/2014/main" id="{D390072A-BF3C-4010-885C-C9C717DD161C}"/>
+              </a:ext>
+            </a:extLst>
+          </p:cNvPr>
+          <p:cNvSpPr>
+            <a:spLocks noGrp="1"/>
+          </p:cNvSpPr>
+          <p:nvPr>
+            <p:ph idx="1"/>
+          </p:nvPr>
+        </p:nvSpPr>
+        <p:spPr>
+          <a:xfrm>
+            <a:off x="838200" y="1825625"/>
+            <a:ext cx="10515600" cy="1184275"/>
+          </a:xfrm>
+        </p:spPr>
+        <p:txBody>
+          <a:bodyPr/>
+          <a:lstStyle/>
+          <a:p>
+            <a:pPr marL="0" indent="0">
+              <a:buNone/>
+            </a:pPr>
+            <a:r>
+              <a:rPr lang="ru-RU" dirty="0">
+                <a:latin typeface="Times New Roman" panose="02020603050405020304" pitchFamily="18" charset="0"/>
+                <a:cs typeface="Times New Roman" panose="02020603050405020304" pitchFamily="18" charset="0"/>
+              </a:rPr>
+              <a:t>Интерфейс сделан в консоли</a:t>
+            </a:r>
+            <a:r>
+              <a:rPr lang="en-US" dirty="0">
+                <a:latin typeface="Times New Roman" panose="02020603050405020304" pitchFamily="18" charset="0"/>
+                <a:cs typeface="Times New Roman" panose="02020603050405020304" pitchFamily="18" charset="0"/>
+              </a:rPr>
+              <a:t> </a:t>
+            </a:r>
+            <a:endParaRPr lang="ru-RU" dirty="0">
+              <a:latin typeface="Times New Roman" panose="02020603050405020304" pitchFamily="18" charset="0"/>
+              <a:cs typeface="Times New Roman" panose="02020603050405020304" pitchFamily="18" charset="0"/>
+            </a:endParaRPr>
+          </a:p>
+        </p:txBody>
+      </p:sp>
+      <p:pic>
+        <p:nvPicPr>
+          <p:cNvPr id="5" name="Рисунок 4">
+            <a:extLst>
+              <a:ext uri="{FF2B5EF4-FFF2-40B4-BE49-F238E27FC236}">
+                <a16:creationId xmlns:a16="http://schemas.microsoft.com/office/drawing/2014/main" id="{F1803EA9-7CBA-45D1-8B5D-8C299B58976B}"/>
+              </a:ext>
+            </a:extLst>
+          </p:cNvPr>
+          <p:cNvPicPr>
+            <a:picLocks noChangeAspect="1"/>
+          </p:cNvPicPr>
+          <p:nvPr/>
+        </p:nvPicPr>
+        <p:blipFill>
+          <a:blip r:embed="rId2"/>
+          <a:stretch>
+            <a:fillRect/>
+          </a:stretch>
+        </p:blipFill>
+        <p:spPr>
+          <a:xfrm>
+            <a:off x="3300282" y="3429000"/>
+            <a:ext cx="4196133" cy="2560717"/>
+          </a:xfrm>
+          <a:prstGeom prst="rect">
+            <a:avLst/>
+          </a:prstGeom>
+        </p:spPr>
+      </p:pic>
+    </p:spTree>
+    <p:extLst>
+      <p:ext uri="{BB962C8B-B14F-4D97-AF65-F5344CB8AC3E}">
+        <p14:creationId xmlns:p14="http://schemas.microsoft.com/office/powerpoint/2010/main" val="4182461980"/>
+      </p:ext>
+    </p:extLst>
+  </p:cSld>
+  <p:clrMapOvr>
+    <a:masterClrMapping/>
+  </p:clrMapOvr>
+</p:sld>
+</file>
+
+<file path=ppt/slides/slide11.xml><?xml version="1.0" encoding="utf-8"?>
+<p:sld xmlns:a="http://schemas.openxmlformats.org/drawingml/2006/main" xmlns:r="http://schemas.openxmlformats.org/officeDocument/2006/relationships" xmlns:p="http://schemas.openxmlformats.org/presentationml/2006/main">
+  <p:cSld>
+    <p:spTree>
+      <p:nvGrpSpPr>
+        <p:cNvPr id="1" name=""/>
+        <p:cNvGrpSpPr/>
+        <p:nvPr/>
+      </p:nvGrpSpPr>
+      <p:grpSpPr>
+        <a:xfrm>
+          <a:off x="0" y="0"/>
+          <a:ext cx="0" cy="0"/>
+          <a:chOff x="0" y="0"/>
+          <a:chExt cx="0" cy="0"/>
+        </a:xfrm>
+      </p:grpSpPr>
       <p:grpSp>
         <p:nvGrpSpPr>
           <p:cNvPr id="11" name="Группа 10">
@@ -3513,8 +3708,8 @@
         </p:nvGrpSpPr>
         <p:grpSpPr>
           <a:xfrm>
-            <a:off x="1997163" y="102145"/>
-            <a:ext cx="7323006" cy="6653710"/>
+            <a:off x="-595268" y="0"/>
+            <a:ext cx="13066668" cy="6653710"/>
             <a:chOff x="2072662" y="716018"/>
             <a:chExt cx="6651888" cy="6141982"/>
           </a:xfrm>
@@ -3650,8 +3845,8 @@
         </p:nvSpPr>
         <p:spPr>
           <a:xfrm>
-            <a:off x="6820249" y="1754"/>
-            <a:ext cx="2248250" cy="2102406"/>
+            <a:off x="8306139" y="-589994"/>
+            <a:ext cx="3466052" cy="3053794"/>
           </a:xfrm>
           <a:prstGeom prst="sun">
             <a:avLst/>
